--- a/docs/handover/05_PoC_범위_정의서_요약.pptx
+++ b/docs/handover/05_PoC_범위_정의서_요약.pptx
@@ -13806,7 +13806,7 @@
                 <a:ea typeface="Malgun Gothic" pitchFamily="34" charset="-122"/>
                 <a:cs typeface="Malgun Gothic" pitchFamily="34" charset="-120"/>
               </a:rPr>
-              <a:t>출처: PoC 범위 정의서 §6 · 서명 기록 csv · 교차검증 누적 원장(2026-09-13) · 시세 이력 대조 검증(2026-09-13)</a:t>
+              <a:t>출처: PoC 범위 정의서 §6·§6.1 신뢰도 지표 2단계 체계(2026-09-14: 순위 안정성 0.75 · 참고 범위 포함률 75/72/72% · 비정형 도달률 90%) · 서명 기록 csv · 교차검증 누적 원장</a:t>
             </a:r>
             <a:endParaRPr lang="en-US" sz="800" dirty="0"/>
           </a:p>
@@ -16326,7 +16326,7 @@
                 <a:ea typeface="Malgun Gothic" pitchFamily="34" charset="-122"/>
                 <a:cs typeface="Malgun Gothic" pitchFamily="34" charset="-120"/>
               </a:rPr>
-              <a:t>2단계(확률 가격 범위) 재개 조건 — 4가지 모두 충족 시</a:t>
+              <a:t>2단계 재개 조건 4가지 — 시범판 실현성 평가(9/14): 동결 유지, 기준선 80% 범위 포함률 5/20/60일 78/74/62%</a:t>
             </a:r>
             <a:endParaRPr lang="en-US" sz="1100" dirty="0"/>
           </a:p>

--- a/docs/handover/05_PoC_범위_정의서_요약.pptx
+++ b/docs/handover/05_PoC_범위_정의서_요약.pptx
@@ -13417,7 +13417,7 @@
                 <a:ea typeface="청정원명조 R"/>
                 <a:cs typeface="청정원명조 R"/>
               </a:rPr>
-              <a:t>1주/1개월/3개월 실제 변화 + 변수→대두유 연결 설명 + 인과 연결된 사례만</a:t>
+              <a:t>1주/1개월/3개월 실제 변화 + 변수→대두유 연결 설명 + 관련 변수로 등재된 사례만</a:t>
             </a:r>
           </a:p>
         </p:txBody>
@@ -19867,7 +19867,7 @@
                           <a:ea typeface="청정원명조 R"/>
                           <a:cs typeface="청정원명조 R"/>
                         </a:rPr>
-                        <a:t>온톨로지 파생 키워드·인과 경로로 정량+비정형 하이브리드, 창 14일, 변인마다 연결 근거 한 줄</a:t>
+                        <a:t>용어·인과 사전 파생 키워드·등재 경로로 정량+비정형 하이브리드, 창 14일, 변인마다 연결 근거 한 줄</a:t>
                       </a:r>
                     </a:p>
                   </a:txBody>
@@ -19927,7 +19927,7 @@
                           <a:ea typeface="청정원명조 R"/>
                           <a:cs typeface="청정원명조 R"/>
                         </a:rPr>
-                        <a:t>변수–사례 인과 관련 필터 + 변수→대두유 연결 설명</a:t>
+                        <a:t>변수–사례 관련성 필터(관련 변수 등재) + 변수→대두유 연결 설명</a:t>
                       </a:r>
                     </a:p>
                   </a:txBody>
@@ -19987,7 +19987,7 @@
                           <a:ea typeface="청정원명조 R"/>
                           <a:cs typeface="청정원명조 R"/>
                         </a:rPr>
-                        <a:t>수집 단계에서 기사별 한국어 헤드라인 생성·캐시, 브리프 뉴스·매체·지정학 카드 적용</a:t>
+                        <a:t>수집 단계에서 기사별 한국어 헤드라인 생성·캐시(일 상한 60건·실패는 원제), 브리프 뉴스·매체·지정학 카드 적용 — 실판정은 자동 실행 결과로</a:t>
                       </a:r>
                     </a:p>
                   </a:txBody>
